--- a/thought_bottleneck.pptx
+++ b/thought_bottleneck.pptx
@@ -12,8 +12,8 @@
     <p:sldId id="261" r:id="rId6"/>
     <p:sldId id="264" r:id="rId7"/>
     <p:sldId id="259" r:id="rId8"/>
-    <p:sldId id="262" r:id="rId9"/>
-    <p:sldId id="263" r:id="rId10"/>
+    <p:sldId id="263" r:id="rId9"/>
+    <p:sldId id="262" r:id="rId10"/>
   </p:sldIdLst>
   <p:sldSz cx="12192000" cy="6858000"/>
   <p:notesSz cx="6858000" cy="9144000"/>
@@ -5814,6 +5814,36 @@
           </a:p>
         </p:txBody>
       </p:sp>
+      <p:pic>
+        <p:nvPicPr>
+          <p:cNvPr id="12" name="Picture 11">
+            <a:extLst>
+              <a:ext uri="{FF2B5EF4-FFF2-40B4-BE49-F238E27FC236}">
+                <a16:creationId xmlns:a16="http://schemas.microsoft.com/office/drawing/2014/main" id="{1D1213DF-A204-2CF8-51AB-712A1D5B1E95}"/>
+              </a:ext>
+            </a:extLst>
+          </p:cNvPr>
+          <p:cNvPicPr>
+            <a:picLocks noChangeAspect="1"/>
+          </p:cNvPicPr>
+          <p:nvPr/>
+        </p:nvPicPr>
+        <p:blipFill>
+          <a:blip r:embed="rId2"/>
+          <a:stretch>
+            <a:fillRect/>
+          </a:stretch>
+        </p:blipFill>
+        <p:spPr>
+          <a:xfrm>
+            <a:off x="7104724" y="1508760"/>
+            <a:ext cx="3779848" cy="5197290"/>
+          </a:xfrm>
+          <a:prstGeom prst="rect">
+            <a:avLst/>
+          </a:prstGeom>
+        </p:spPr>
+      </p:pic>
     </p:spTree>
   </p:cSld>
   <p:clrMapOvr>
@@ -5876,7 +5906,7 @@
                   <a:srgbClr val="00B4D8"/>
                 </a:solidFill>
               </a:rPr>
-              <a:t>OpenClaw Overview</a:t>
+              <a:t>Getting Started</a:t>
             </a:r>
           </a:p>
         </p:txBody>
@@ -5934,7 +5964,7 @@
         <p:spPr>
           <a:xfrm>
             <a:off x="246888" y="1463040"/>
-            <a:ext cx="11704320" cy="777240"/>
+            <a:ext cx="5669280" cy="457200"/>
           </a:xfrm>
           <a:prstGeom prst="rect">
             <a:avLst/>
@@ -5949,37 +5979,478 @@
           <a:p>
             <a:pPr algn="l"/>
             <a:r>
-              <a:rPr sz="1600" b="0" i="1">
+              <a:rPr sz="1900" b="1" i="0">
+                <a:solidFill>
+                  <a:srgbClr val="FFFFFF"/>
+                </a:solidFill>
+              </a:rPr>
+              <a:t>OpenClaw on Docker · Azure VM</a:t>
+            </a:r>
+          </a:p>
+        </p:txBody>
+      </p:sp>
+      <p:sp>
+        <p:nvSpPr>
+          <p:cNvPr id="5" name="TextBox 4"/>
+          <p:cNvSpPr txBox="1"/>
+          <p:nvPr/>
+        </p:nvSpPr>
+        <p:spPr>
+          <a:xfrm>
+            <a:off x="246888" y="2011680"/>
+            <a:ext cx="5669280" cy="457200"/>
+          </a:xfrm>
+          <a:prstGeom prst="rect">
+            <a:avLst/>
+          </a:prstGeom>
+          <a:noFill/>
+        </p:spPr>
+        <p:txBody>
+          <a:bodyPr wrap="square">
+            <a:spAutoFit/>
+          </a:bodyPr>
+          <a:lstStyle/>
+          <a:p>
+            <a:pPr algn="l"/>
+            <a:r>
+              <a:rPr sz="1400" b="0" i="0">
                 <a:solidFill>
                   <a:srgbClr val="B0C4DE"/>
                 </a:solidFill>
               </a:rPr>
-              <a:t>OpenClaw is a self-hosted AI gateway and agent platform — connecting LLMs to your life, your tools, and your data without sending everything to the cloud.</a:t>
-            </a:r>
-          </a:p>
-        </p:txBody>
-      </p:sp>
-      <p:sp>
-        <p:nvSpPr>
-          <p:cNvPr id="5" name="Rectangle 4"/>
+              <a:t>1.  Provision Ubuntu 22.04 VM on Azure</a:t>
+            </a:r>
+          </a:p>
+        </p:txBody>
+      </p:sp>
+      <p:sp>
+        <p:nvSpPr>
+          <p:cNvPr id="6" name="TextBox 5"/>
+          <p:cNvSpPr txBox="1"/>
+          <p:nvPr/>
+        </p:nvSpPr>
+        <p:spPr>
+          <a:xfrm>
+            <a:off x="246888" y="2414016"/>
+            <a:ext cx="5669280" cy="457200"/>
+          </a:xfrm>
+          <a:prstGeom prst="rect">
+            <a:avLst/>
+          </a:prstGeom>
+          <a:noFill/>
+        </p:spPr>
+        <p:txBody>
+          <a:bodyPr wrap="square">
+            <a:spAutoFit/>
+          </a:bodyPr>
+          <a:lstStyle/>
+          <a:p>
+            <a:pPr algn="l"/>
+            <a:r>
+              <a:rPr sz="1400" b="0" i="0">
+                <a:solidFill>
+                  <a:srgbClr val="B0C4DE"/>
+                </a:solidFill>
+              </a:rPr>
+              <a:t>2.  Install Docker + Docker Compose</a:t>
+            </a:r>
+          </a:p>
+        </p:txBody>
+      </p:sp>
+      <p:sp>
+        <p:nvSpPr>
+          <p:cNvPr id="7" name="TextBox 6"/>
+          <p:cNvSpPr txBox="1"/>
+          <p:nvPr/>
+        </p:nvSpPr>
+        <p:spPr>
+          <a:xfrm>
+            <a:off x="246888" y="2816352"/>
+            <a:ext cx="5669280" cy="457200"/>
+          </a:xfrm>
+          <a:prstGeom prst="rect">
+            <a:avLst/>
+          </a:prstGeom>
+          <a:noFill/>
+        </p:spPr>
+        <p:txBody>
+          <a:bodyPr wrap="square">
+            <a:spAutoFit/>
+          </a:bodyPr>
+          <a:lstStyle/>
+          <a:p>
+            <a:pPr algn="l"/>
+            <a:r>
+              <a:rPr sz="1400" b="0" i="0">
+                <a:solidFill>
+                  <a:srgbClr val="B0C4DE"/>
+                </a:solidFill>
+              </a:rPr>
+              <a:t>3.  Pull the OpenClaw Docker image</a:t>
+            </a:r>
+          </a:p>
+        </p:txBody>
+      </p:sp>
+      <p:sp>
+        <p:nvSpPr>
+          <p:cNvPr id="8" name="TextBox 7"/>
+          <p:cNvSpPr txBox="1"/>
+          <p:nvPr/>
+        </p:nvSpPr>
+        <p:spPr>
+          <a:xfrm>
+            <a:off x="246888" y="3218688"/>
+            <a:ext cx="5669280" cy="457200"/>
+          </a:xfrm>
+          <a:prstGeom prst="rect">
+            <a:avLst/>
+          </a:prstGeom>
+          <a:noFill/>
+        </p:spPr>
+        <p:txBody>
+          <a:bodyPr wrap="square">
+            <a:spAutoFit/>
+          </a:bodyPr>
+          <a:lstStyle/>
+          <a:p>
+            <a:pPr algn="l"/>
+            <a:r>
+              <a:rPr sz="1400" b="0" i="0">
+                <a:solidFill>
+                  <a:srgbClr val="B0C4DE"/>
+                </a:solidFill>
+              </a:rPr>
+              <a:t>4.  Configure openclaw.json
+     (model keys, channels, workspace)</a:t>
+            </a:r>
+          </a:p>
+        </p:txBody>
+      </p:sp>
+      <p:sp>
+        <p:nvSpPr>
+          <p:cNvPr id="9" name="TextBox 8"/>
+          <p:cNvSpPr txBox="1"/>
+          <p:nvPr/>
+        </p:nvSpPr>
+        <p:spPr>
+          <a:xfrm>
+            <a:off x="246888" y="3621024"/>
+            <a:ext cx="5669280" cy="457200"/>
+          </a:xfrm>
+          <a:prstGeom prst="rect">
+            <a:avLst/>
+          </a:prstGeom>
+          <a:noFill/>
+        </p:spPr>
+        <p:txBody>
+          <a:bodyPr wrap="square">
+            <a:spAutoFit/>
+          </a:bodyPr>
+          <a:lstStyle/>
+          <a:p>
+            <a:pPr algn="l"/>
+            <a:r>
+              <a:rPr sz="1400" b="0" i="0">
+                <a:solidFill>
+                  <a:srgbClr val="B0C4DE"/>
+                </a:solidFill>
+              </a:rPr>
+              <a:t>5.  docker compose up -d</a:t>
+            </a:r>
+          </a:p>
+        </p:txBody>
+      </p:sp>
+      <p:sp>
+        <p:nvSpPr>
+          <p:cNvPr id="10" name="TextBox 9"/>
+          <p:cNvSpPr txBox="1"/>
+          <p:nvPr/>
+        </p:nvSpPr>
+        <p:spPr>
+          <a:xfrm>
+            <a:off x="246888" y="4023360"/>
+            <a:ext cx="5669280" cy="457200"/>
+          </a:xfrm>
+          <a:prstGeom prst="rect">
+            <a:avLst/>
+          </a:prstGeom>
+          <a:noFill/>
+        </p:spPr>
+        <p:txBody>
+          <a:bodyPr wrap="square">
+            <a:spAutoFit/>
+          </a:bodyPr>
+          <a:lstStyle/>
+          <a:p>
+            <a:pPr algn="l"/>
+            <a:r>
+              <a:rPr sz="1400" b="0" i="0">
+                <a:solidFill>
+                  <a:srgbClr val="B0C4DE"/>
+                </a:solidFill>
+              </a:rPr>
+              <a:t>6.  Connect WhatsApp / Telegram channel</a:t>
+            </a:r>
+          </a:p>
+        </p:txBody>
+      </p:sp>
+      <p:sp>
+        <p:nvSpPr>
+          <p:cNvPr id="11" name="TextBox 10"/>
+          <p:cNvSpPr txBox="1"/>
+          <p:nvPr/>
+        </p:nvSpPr>
+        <p:spPr>
+          <a:xfrm>
+            <a:off x="6217920" y="1463040"/>
+            <a:ext cx="5669280" cy="457200"/>
+          </a:xfrm>
+          <a:prstGeom prst="rect">
+            <a:avLst/>
+          </a:prstGeom>
+          <a:noFill/>
+        </p:spPr>
+        <p:txBody>
+          <a:bodyPr wrap="square">
+            <a:spAutoFit/>
+          </a:bodyPr>
+          <a:lstStyle/>
+          <a:p>
+            <a:pPr algn="l"/>
+            <a:r>
+              <a:rPr sz="1900" b="1" i="0">
+                <a:solidFill>
+                  <a:srgbClr val="FFFFFF"/>
+                </a:solidFill>
+              </a:rPr>
+              <a:t>Hermes — Self-Healing Upgrades</a:t>
+            </a:r>
+          </a:p>
+        </p:txBody>
+      </p:sp>
+      <p:sp>
+        <p:nvSpPr>
+          <p:cNvPr id="12" name="TextBox 11"/>
+          <p:cNvSpPr txBox="1"/>
+          <p:nvPr/>
+        </p:nvSpPr>
+        <p:spPr>
+          <a:xfrm>
+            <a:off x="6217920" y="2011680"/>
+            <a:ext cx="5669280" cy="457200"/>
+          </a:xfrm>
+          <a:prstGeom prst="rect">
+            <a:avLst/>
+          </a:prstGeom>
+          <a:noFill/>
+        </p:spPr>
+        <p:txBody>
+          <a:bodyPr wrap="square">
+            <a:spAutoFit/>
+          </a:bodyPr>
+          <a:lstStyle/>
+          <a:p>
+            <a:pPr algn="l"/>
+            <a:r>
+              <a:rPr sz="1400" b="0" i="0">
+                <a:solidFill>
+                  <a:srgbClr val="B0C4DE"/>
+                </a:solidFill>
+              </a:rPr>
+              <a:t>1.  Install Hermes via OpenClaw plugin</a:t>
+            </a:r>
+          </a:p>
+        </p:txBody>
+      </p:sp>
+      <p:sp>
+        <p:nvSpPr>
+          <p:cNvPr id="13" name="TextBox 12"/>
+          <p:cNvSpPr txBox="1"/>
+          <p:nvPr/>
+        </p:nvSpPr>
+        <p:spPr>
+          <a:xfrm>
+            <a:off x="6217920" y="2414016"/>
+            <a:ext cx="5669280" cy="457200"/>
+          </a:xfrm>
+          <a:prstGeom prst="rect">
+            <a:avLst/>
+          </a:prstGeom>
+          <a:noFill/>
+        </p:spPr>
+        <p:txBody>
+          <a:bodyPr wrap="square">
+            <a:spAutoFit/>
+          </a:bodyPr>
+          <a:lstStyle/>
+          <a:p>
+            <a:pPr algn="l"/>
+            <a:r>
+              <a:rPr sz="1400" b="0" i="0">
+                <a:solidFill>
+                  <a:srgbClr val="B0C4DE"/>
+                </a:solidFill>
+              </a:rPr>
+              <a:t>2.  Configure as an advisor/orchestrator agent</a:t>
+            </a:r>
+          </a:p>
+        </p:txBody>
+      </p:sp>
+      <p:sp>
+        <p:nvSpPr>
+          <p:cNvPr id="14" name="TextBox 13"/>
+          <p:cNvSpPr txBox="1"/>
+          <p:nvPr/>
+        </p:nvSpPr>
+        <p:spPr>
+          <a:xfrm>
+            <a:off x="6217920" y="2816352"/>
+            <a:ext cx="5669280" cy="457200"/>
+          </a:xfrm>
+          <a:prstGeom prst="rect">
+            <a:avLst/>
+          </a:prstGeom>
+          <a:noFill/>
+        </p:spPr>
+        <p:txBody>
+          <a:bodyPr wrap="square">
+            <a:spAutoFit/>
+          </a:bodyPr>
+          <a:lstStyle/>
+          <a:p>
+            <a:pPr algn="l"/>
+            <a:r>
+              <a:rPr sz="1400" b="0" i="0">
+                <a:solidFill>
+                  <a:srgbClr val="B0C4DE"/>
+                </a:solidFill>
+              </a:rPr>
+              <a:t>3.  Set upgrade watch on OpenClaw service</a:t>
+            </a:r>
+          </a:p>
+        </p:txBody>
+      </p:sp>
+      <p:sp>
+        <p:nvSpPr>
+          <p:cNvPr id="15" name="TextBox 14"/>
+          <p:cNvSpPr txBox="1"/>
+          <p:nvPr/>
+        </p:nvSpPr>
+        <p:spPr>
+          <a:xfrm>
+            <a:off x="6217920" y="3218688"/>
+            <a:ext cx="5669280" cy="457200"/>
+          </a:xfrm>
+          <a:prstGeom prst="rect">
+            <a:avLst/>
+          </a:prstGeom>
+          <a:noFill/>
+        </p:spPr>
+        <p:txBody>
+          <a:bodyPr wrap="square">
+            <a:spAutoFit/>
+          </a:bodyPr>
+          <a:lstStyle/>
+          <a:p>
+            <a:pPr algn="l"/>
+            <a:r>
+              <a:rPr sz="1400" b="0" i="0">
+                <a:solidFill>
+                  <a:srgbClr val="B0C4DE"/>
+                </a:solidFill>
+              </a:rPr>
+              <a:t>4.  Hermes detects breaking changes post-upgrade</a:t>
+            </a:r>
+          </a:p>
+        </p:txBody>
+      </p:sp>
+      <p:sp>
+        <p:nvSpPr>
+          <p:cNvPr id="16" name="TextBox 15"/>
+          <p:cNvSpPr txBox="1"/>
+          <p:nvPr/>
+        </p:nvSpPr>
+        <p:spPr>
+          <a:xfrm>
+            <a:off x="6217920" y="3621024"/>
+            <a:ext cx="5669280" cy="457200"/>
+          </a:xfrm>
+          <a:prstGeom prst="rect">
+            <a:avLst/>
+          </a:prstGeom>
+          <a:noFill/>
+        </p:spPr>
+        <p:txBody>
+          <a:bodyPr wrap="square">
+            <a:spAutoFit/>
+          </a:bodyPr>
+          <a:lstStyle/>
+          <a:p>
+            <a:pPr algn="l"/>
+            <a:r>
+              <a:rPr sz="1400" b="0" i="0">
+                <a:solidFill>
+                  <a:srgbClr val="B0C4DE"/>
+                </a:solidFill>
+              </a:rPr>
+              <a:t>5.  Auto-generates and applies fixes</a:t>
+            </a:r>
+          </a:p>
+        </p:txBody>
+      </p:sp>
+      <p:sp>
+        <p:nvSpPr>
+          <p:cNvPr id="17" name="TextBox 16"/>
+          <p:cNvSpPr txBox="1"/>
+          <p:nvPr/>
+        </p:nvSpPr>
+        <p:spPr>
+          <a:xfrm>
+            <a:off x="6217920" y="4023360"/>
+            <a:ext cx="5669280" cy="457200"/>
+          </a:xfrm>
+          <a:prstGeom prst="rect">
+            <a:avLst/>
+          </a:prstGeom>
+          <a:noFill/>
+        </p:spPr>
+        <p:txBody>
+          <a:bodyPr wrap="square">
+            <a:spAutoFit/>
+          </a:bodyPr>
+          <a:lstStyle/>
+          <a:p>
+            <a:pPr algn="l"/>
+            <a:r>
+              <a:rPr sz="1400" b="0" i="0">
+                <a:solidFill>
+                  <a:srgbClr val="B0C4DE"/>
+                </a:solidFill>
+              </a:rPr>
+              <a:t>6.  Reports back with change summary</a:t>
+            </a:r>
+          </a:p>
+        </p:txBody>
+      </p:sp>
+      <p:sp>
+        <p:nvSpPr>
+          <p:cNvPr id="18" name="Rectangle 17"/>
           <p:cNvSpPr/>
           <p:nvPr/>
         </p:nvSpPr>
         <p:spPr>
           <a:xfrm>
-            <a:off x="246888" y="2423160"/>
-            <a:ext cx="3657600" cy="1097280"/>
+            <a:off x="6035040" y="1417320"/>
+            <a:ext cx="27432" cy="4754880"/>
           </a:xfrm>
           <a:prstGeom prst="rect">
             <a:avLst/>
           </a:prstGeom>
           <a:solidFill>
-            <a:srgbClr val="060F1A"/>
+            <a:srgbClr val="00B4D8"/>
           </a:solidFill>
           <a:ln>
-            <a:solidFill>
-              <a:srgbClr val="00B4D8"/>
-            </a:solidFill>
+            <a:noFill/>
           </a:ln>
         </p:spPr>
         <p:style>
@@ -6002,678 +6473,6 @@
           <a:p>
             <a:pPr algn="ctr"/>
             <a:endParaRPr/>
-          </a:p>
-        </p:txBody>
-      </p:sp>
-      <p:sp>
-        <p:nvSpPr>
-          <p:cNvPr id="6" name="TextBox 5"/>
-          <p:cNvSpPr txBox="1"/>
-          <p:nvPr/>
-        </p:nvSpPr>
-        <p:spPr>
-          <a:xfrm>
-            <a:off x="320040" y="2468879"/>
-            <a:ext cx="3474720" cy="365760"/>
-          </a:xfrm>
-          <a:prstGeom prst="rect">
-            <a:avLst/>
-          </a:prstGeom>
-          <a:noFill/>
-        </p:spPr>
-        <p:txBody>
-          <a:bodyPr wrap="square">
-            <a:spAutoFit/>
-          </a:bodyPr>
-          <a:lstStyle/>
-          <a:p>
-            <a:pPr algn="l"/>
-            <a:r>
-              <a:rPr sz="1500" b="1" i="0">
-                <a:solidFill>
-                  <a:srgbClr val="00B4D8"/>
-                </a:solidFill>
-              </a:rPr>
-              <a:t>🔌  Multi-provider</a:t>
-            </a:r>
-          </a:p>
-        </p:txBody>
-      </p:sp>
-      <p:sp>
-        <p:nvSpPr>
-          <p:cNvPr id="7" name="TextBox 6"/>
-          <p:cNvSpPr txBox="1"/>
-          <p:nvPr/>
-        </p:nvSpPr>
-        <p:spPr>
-          <a:xfrm>
-            <a:off x="320040" y="2880360"/>
-            <a:ext cx="3474720" cy="502920"/>
-          </a:xfrm>
-          <a:prstGeom prst="rect">
-            <a:avLst/>
-          </a:prstGeom>
-          <a:noFill/>
-        </p:spPr>
-        <p:txBody>
-          <a:bodyPr wrap="square">
-            <a:spAutoFit/>
-          </a:bodyPr>
-          <a:lstStyle/>
-          <a:p>
-            <a:pPr algn="l"/>
-            <a:r>
-              <a:rPr sz="1300" b="0" i="0">
-                <a:solidFill>
-                  <a:srgbClr val="B0C4DE"/>
-                </a:solidFill>
-              </a:rPr>
-              <a:t>Anthropic, OpenAI, Google, xAI, Mistral…</a:t>
-            </a:r>
-          </a:p>
-        </p:txBody>
-      </p:sp>
-      <p:sp>
-        <p:nvSpPr>
-          <p:cNvPr id="8" name="Rectangle 7"/>
-          <p:cNvSpPr/>
-          <p:nvPr/>
-        </p:nvSpPr>
-        <p:spPr>
-          <a:xfrm>
-            <a:off x="4160520" y="2423160"/>
-            <a:ext cx="3657600" cy="1097280"/>
-          </a:xfrm>
-          <a:prstGeom prst="rect">
-            <a:avLst/>
-          </a:prstGeom>
-          <a:solidFill>
-            <a:srgbClr val="060F1A"/>
-          </a:solidFill>
-          <a:ln>
-            <a:solidFill>
-              <a:srgbClr val="00B4D8"/>
-            </a:solidFill>
-          </a:ln>
-        </p:spPr>
-        <p:style>
-          <a:lnRef idx="1">
-            <a:schemeClr val="accent1"/>
-          </a:lnRef>
-          <a:fillRef idx="3">
-            <a:schemeClr val="accent1"/>
-          </a:fillRef>
-          <a:effectRef idx="2">
-            <a:schemeClr val="accent1"/>
-          </a:effectRef>
-          <a:fontRef idx="minor">
-            <a:schemeClr val="lt1"/>
-          </a:fontRef>
-        </p:style>
-        <p:txBody>
-          <a:bodyPr rtlCol="0" anchor="ctr"/>
-          <a:lstStyle/>
-          <a:p>
-            <a:pPr algn="ctr"/>
-            <a:endParaRPr/>
-          </a:p>
-        </p:txBody>
-      </p:sp>
-      <p:sp>
-        <p:nvSpPr>
-          <p:cNvPr id="9" name="TextBox 8"/>
-          <p:cNvSpPr txBox="1"/>
-          <p:nvPr/>
-        </p:nvSpPr>
-        <p:spPr>
-          <a:xfrm>
-            <a:off x="4233672" y="2468879"/>
-            <a:ext cx="3474720" cy="365760"/>
-          </a:xfrm>
-          <a:prstGeom prst="rect">
-            <a:avLst/>
-          </a:prstGeom>
-          <a:noFill/>
-        </p:spPr>
-        <p:txBody>
-          <a:bodyPr wrap="square">
-            <a:spAutoFit/>
-          </a:bodyPr>
-          <a:lstStyle/>
-          <a:p>
-            <a:pPr algn="l"/>
-            <a:r>
-              <a:rPr sz="1500" b="1" i="0">
-                <a:solidFill>
-                  <a:srgbClr val="00B4D8"/>
-                </a:solidFill>
-              </a:rPr>
-              <a:t>🧠  Long-term memory</a:t>
-            </a:r>
-          </a:p>
-        </p:txBody>
-      </p:sp>
-      <p:sp>
-        <p:nvSpPr>
-          <p:cNvPr id="10" name="TextBox 9"/>
-          <p:cNvSpPr txBox="1"/>
-          <p:nvPr/>
-        </p:nvSpPr>
-        <p:spPr>
-          <a:xfrm>
-            <a:off x="4233672" y="2880360"/>
-            <a:ext cx="3474720" cy="502920"/>
-          </a:xfrm>
-          <a:prstGeom prst="rect">
-            <a:avLst/>
-          </a:prstGeom>
-          <a:noFill/>
-        </p:spPr>
-        <p:txBody>
-          <a:bodyPr wrap="square">
-            <a:spAutoFit/>
-          </a:bodyPr>
-          <a:lstStyle/>
-          <a:p>
-            <a:pPr algn="l"/>
-            <a:r>
-              <a:rPr sz="1300" b="0" i="0">
-                <a:solidFill>
-                  <a:srgbClr val="B0C4DE"/>
-                </a:solidFill>
-              </a:rPr>
-              <a:t>Semantic search across sessions + Obsidian vault</a:t>
-            </a:r>
-          </a:p>
-        </p:txBody>
-      </p:sp>
-      <p:sp>
-        <p:nvSpPr>
-          <p:cNvPr id="11" name="Rectangle 10"/>
-          <p:cNvSpPr/>
-          <p:nvPr/>
-        </p:nvSpPr>
-        <p:spPr>
-          <a:xfrm>
-            <a:off x="8046720" y="2423160"/>
-            <a:ext cx="3657600" cy="1097280"/>
-          </a:xfrm>
-          <a:prstGeom prst="rect">
-            <a:avLst/>
-          </a:prstGeom>
-          <a:solidFill>
-            <a:srgbClr val="060F1A"/>
-          </a:solidFill>
-          <a:ln>
-            <a:solidFill>
-              <a:srgbClr val="00B4D8"/>
-            </a:solidFill>
-          </a:ln>
-        </p:spPr>
-        <p:style>
-          <a:lnRef idx="1">
-            <a:schemeClr val="accent1"/>
-          </a:lnRef>
-          <a:fillRef idx="3">
-            <a:schemeClr val="accent1"/>
-          </a:fillRef>
-          <a:effectRef idx="2">
-            <a:schemeClr val="accent1"/>
-          </a:effectRef>
-          <a:fontRef idx="minor">
-            <a:schemeClr val="lt1"/>
-          </a:fontRef>
-        </p:style>
-        <p:txBody>
-          <a:bodyPr rtlCol="0" anchor="ctr"/>
-          <a:lstStyle/>
-          <a:p>
-            <a:pPr algn="ctr"/>
-            <a:endParaRPr/>
-          </a:p>
-        </p:txBody>
-      </p:sp>
-      <p:sp>
-        <p:nvSpPr>
-          <p:cNvPr id="12" name="TextBox 11"/>
-          <p:cNvSpPr txBox="1"/>
-          <p:nvPr/>
-        </p:nvSpPr>
-        <p:spPr>
-          <a:xfrm>
-            <a:off x="8119872" y="2468879"/>
-            <a:ext cx="3474720" cy="365760"/>
-          </a:xfrm>
-          <a:prstGeom prst="rect">
-            <a:avLst/>
-          </a:prstGeom>
-          <a:noFill/>
-        </p:spPr>
-        <p:txBody>
-          <a:bodyPr wrap="square">
-            <a:spAutoFit/>
-          </a:bodyPr>
-          <a:lstStyle/>
-          <a:p>
-            <a:pPr algn="l"/>
-            <a:r>
-              <a:rPr sz="1500" b="1" i="0">
-                <a:solidFill>
-                  <a:srgbClr val="00B4D8"/>
-                </a:solidFill>
-              </a:rPr>
-              <a:t>📱  Any channel</a:t>
-            </a:r>
-          </a:p>
-        </p:txBody>
-      </p:sp>
-      <p:sp>
-        <p:nvSpPr>
-          <p:cNvPr id="13" name="TextBox 12"/>
-          <p:cNvSpPr txBox="1"/>
-          <p:nvPr/>
-        </p:nvSpPr>
-        <p:spPr>
-          <a:xfrm>
-            <a:off x="8119872" y="2880360"/>
-            <a:ext cx="3474720" cy="502920"/>
-          </a:xfrm>
-          <a:prstGeom prst="rect">
-            <a:avLst/>
-          </a:prstGeom>
-          <a:noFill/>
-        </p:spPr>
-        <p:txBody>
-          <a:bodyPr wrap="square">
-            <a:spAutoFit/>
-          </a:bodyPr>
-          <a:lstStyle/>
-          <a:p>
-            <a:pPr algn="l"/>
-            <a:r>
-              <a:rPr sz="1300" b="0" i="0">
-                <a:solidFill>
-                  <a:srgbClr val="B0C4DE"/>
-                </a:solidFill>
-              </a:rPr>
-              <a:t>WhatsApp, Telegram, Discord, Signal…</a:t>
-            </a:r>
-          </a:p>
-        </p:txBody>
-      </p:sp>
-      <p:sp>
-        <p:nvSpPr>
-          <p:cNvPr id="14" name="Rectangle 13"/>
-          <p:cNvSpPr/>
-          <p:nvPr/>
-        </p:nvSpPr>
-        <p:spPr>
-          <a:xfrm>
-            <a:off x="246888" y="3749039"/>
-            <a:ext cx="3657600" cy="1097280"/>
-          </a:xfrm>
-          <a:prstGeom prst="rect">
-            <a:avLst/>
-          </a:prstGeom>
-          <a:solidFill>
-            <a:srgbClr val="060F1A"/>
-          </a:solidFill>
-          <a:ln>
-            <a:solidFill>
-              <a:srgbClr val="00B4D8"/>
-            </a:solidFill>
-          </a:ln>
-        </p:spPr>
-        <p:style>
-          <a:lnRef idx="1">
-            <a:schemeClr val="accent1"/>
-          </a:lnRef>
-          <a:fillRef idx="3">
-            <a:schemeClr val="accent1"/>
-          </a:fillRef>
-          <a:effectRef idx="2">
-            <a:schemeClr val="accent1"/>
-          </a:effectRef>
-          <a:fontRef idx="minor">
-            <a:schemeClr val="lt1"/>
-          </a:fontRef>
-        </p:style>
-        <p:txBody>
-          <a:bodyPr rtlCol="0" anchor="ctr"/>
-          <a:lstStyle/>
-          <a:p>
-            <a:pPr algn="ctr"/>
-            <a:endParaRPr/>
-          </a:p>
-        </p:txBody>
-      </p:sp>
-      <p:sp>
-        <p:nvSpPr>
-          <p:cNvPr id="15" name="TextBox 14"/>
-          <p:cNvSpPr txBox="1"/>
-          <p:nvPr/>
-        </p:nvSpPr>
-        <p:spPr>
-          <a:xfrm>
-            <a:off x="320040" y="3794759"/>
-            <a:ext cx="3474720" cy="365760"/>
-          </a:xfrm>
-          <a:prstGeom prst="rect">
-            <a:avLst/>
-          </a:prstGeom>
-          <a:noFill/>
-        </p:spPr>
-        <p:txBody>
-          <a:bodyPr wrap="square">
-            <a:spAutoFit/>
-          </a:bodyPr>
-          <a:lstStyle/>
-          <a:p>
-            <a:pPr algn="l"/>
-            <a:r>
-              <a:rPr sz="1500" b="1" i="0">
-                <a:solidFill>
-                  <a:srgbClr val="00B4D8"/>
-                </a:solidFill>
-              </a:rPr>
-              <a:t>🤖  Agentic skills</a:t>
-            </a:r>
-          </a:p>
-        </p:txBody>
-      </p:sp>
-      <p:sp>
-        <p:nvSpPr>
-          <p:cNvPr id="16" name="TextBox 15"/>
-          <p:cNvSpPr txBox="1"/>
-          <p:nvPr/>
-        </p:nvSpPr>
-        <p:spPr>
-          <a:xfrm>
-            <a:off x="320040" y="4206240"/>
-            <a:ext cx="3474720" cy="502920"/>
-          </a:xfrm>
-          <a:prstGeom prst="rect">
-            <a:avLst/>
-          </a:prstGeom>
-          <a:noFill/>
-        </p:spPr>
-        <p:txBody>
-          <a:bodyPr wrap="square">
-            <a:spAutoFit/>
-          </a:bodyPr>
-          <a:lstStyle/>
-          <a:p>
-            <a:pPr algn="l"/>
-            <a:r>
-              <a:rPr sz="1300" b="0" i="0">
-                <a:solidFill>
-                  <a:srgbClr val="B0C4DE"/>
-                </a:solidFill>
-              </a:rPr>
-              <a:t>Scheduled tasks, tools, sub-agents</a:t>
-            </a:r>
-          </a:p>
-        </p:txBody>
-      </p:sp>
-      <p:sp>
-        <p:nvSpPr>
-          <p:cNvPr id="17" name="Rectangle 16"/>
-          <p:cNvSpPr/>
-          <p:nvPr/>
-        </p:nvSpPr>
-        <p:spPr>
-          <a:xfrm>
-            <a:off x="4160520" y="3749039"/>
-            <a:ext cx="3657600" cy="1097280"/>
-          </a:xfrm>
-          <a:prstGeom prst="rect">
-            <a:avLst/>
-          </a:prstGeom>
-          <a:solidFill>
-            <a:srgbClr val="060F1A"/>
-          </a:solidFill>
-          <a:ln>
-            <a:solidFill>
-              <a:srgbClr val="00B4D8"/>
-            </a:solidFill>
-          </a:ln>
-        </p:spPr>
-        <p:style>
-          <a:lnRef idx="1">
-            <a:schemeClr val="accent1"/>
-          </a:lnRef>
-          <a:fillRef idx="3">
-            <a:schemeClr val="accent1"/>
-          </a:fillRef>
-          <a:effectRef idx="2">
-            <a:schemeClr val="accent1"/>
-          </a:effectRef>
-          <a:fontRef idx="minor">
-            <a:schemeClr val="lt1"/>
-          </a:fontRef>
-        </p:style>
-        <p:txBody>
-          <a:bodyPr rtlCol="0" anchor="ctr"/>
-          <a:lstStyle/>
-          <a:p>
-            <a:pPr algn="ctr"/>
-            <a:endParaRPr/>
-          </a:p>
-        </p:txBody>
-      </p:sp>
-      <p:sp>
-        <p:nvSpPr>
-          <p:cNvPr id="18" name="TextBox 17"/>
-          <p:cNvSpPr txBox="1"/>
-          <p:nvPr/>
-        </p:nvSpPr>
-        <p:spPr>
-          <a:xfrm>
-            <a:off x="4233672" y="3794759"/>
-            <a:ext cx="3474720" cy="365760"/>
-          </a:xfrm>
-          <a:prstGeom prst="rect">
-            <a:avLst/>
-          </a:prstGeom>
-          <a:noFill/>
-        </p:spPr>
-        <p:txBody>
-          <a:bodyPr wrap="square">
-            <a:spAutoFit/>
-          </a:bodyPr>
-          <a:lstStyle/>
-          <a:p>
-            <a:pPr algn="l"/>
-            <a:r>
-              <a:rPr sz="1500" b="1" i="0">
-                <a:solidFill>
-                  <a:srgbClr val="00B4D8"/>
-                </a:solidFill>
-              </a:rPr>
-              <a:t>🔒  Self-hosted</a:t>
-            </a:r>
-          </a:p>
-        </p:txBody>
-      </p:sp>
-      <p:sp>
-        <p:nvSpPr>
-          <p:cNvPr id="19" name="TextBox 18"/>
-          <p:cNvSpPr txBox="1"/>
-          <p:nvPr/>
-        </p:nvSpPr>
-        <p:spPr>
-          <a:xfrm>
-            <a:off x="4233672" y="4206240"/>
-            <a:ext cx="3474720" cy="502920"/>
-          </a:xfrm>
-          <a:prstGeom prst="rect">
-            <a:avLst/>
-          </a:prstGeom>
-          <a:noFill/>
-        </p:spPr>
-        <p:txBody>
-          <a:bodyPr wrap="square">
-            <a:spAutoFit/>
-          </a:bodyPr>
-          <a:lstStyle/>
-          <a:p>
-            <a:pPr algn="l"/>
-            <a:r>
-              <a:rPr sz="1300" b="0" i="0">
-                <a:solidFill>
-                  <a:srgbClr val="B0C4DE"/>
-                </a:solidFill>
-              </a:rPr>
-              <a:t>Your data stays on your infrastructure</a:t>
-            </a:r>
-          </a:p>
-        </p:txBody>
-      </p:sp>
-      <p:sp>
-        <p:nvSpPr>
-          <p:cNvPr id="20" name="Rectangle 19"/>
-          <p:cNvSpPr/>
-          <p:nvPr/>
-        </p:nvSpPr>
-        <p:spPr>
-          <a:xfrm>
-            <a:off x="8046720" y="3749039"/>
-            <a:ext cx="3657600" cy="1097280"/>
-          </a:xfrm>
-          <a:prstGeom prst="rect">
-            <a:avLst/>
-          </a:prstGeom>
-          <a:solidFill>
-            <a:srgbClr val="060F1A"/>
-          </a:solidFill>
-          <a:ln>
-            <a:solidFill>
-              <a:srgbClr val="00B4D8"/>
-            </a:solidFill>
-          </a:ln>
-        </p:spPr>
-        <p:style>
-          <a:lnRef idx="1">
-            <a:schemeClr val="accent1"/>
-          </a:lnRef>
-          <a:fillRef idx="3">
-            <a:schemeClr val="accent1"/>
-          </a:fillRef>
-          <a:effectRef idx="2">
-            <a:schemeClr val="accent1"/>
-          </a:effectRef>
-          <a:fontRef idx="minor">
-            <a:schemeClr val="lt1"/>
-          </a:fontRef>
-        </p:style>
-        <p:txBody>
-          <a:bodyPr rtlCol="0" anchor="ctr"/>
-          <a:lstStyle/>
-          <a:p>
-            <a:pPr algn="ctr"/>
-            <a:endParaRPr/>
-          </a:p>
-        </p:txBody>
-      </p:sp>
-      <p:sp>
-        <p:nvSpPr>
-          <p:cNvPr id="21" name="TextBox 20"/>
-          <p:cNvSpPr txBox="1"/>
-          <p:nvPr/>
-        </p:nvSpPr>
-        <p:spPr>
-          <a:xfrm>
-            <a:off x="8119872" y="3794759"/>
-            <a:ext cx="3474720" cy="365760"/>
-          </a:xfrm>
-          <a:prstGeom prst="rect">
-            <a:avLst/>
-          </a:prstGeom>
-          <a:noFill/>
-        </p:spPr>
-        <p:txBody>
-          <a:bodyPr wrap="square">
-            <a:spAutoFit/>
-          </a:bodyPr>
-          <a:lstStyle/>
-          <a:p>
-            <a:pPr algn="l"/>
-            <a:r>
-              <a:rPr sz="1500" b="1" i="0">
-                <a:solidFill>
-                  <a:srgbClr val="00B4D8"/>
-                </a:solidFill>
-              </a:rPr>
-              <a:t>🛠  Extensible</a:t>
-            </a:r>
-          </a:p>
-        </p:txBody>
-      </p:sp>
-      <p:sp>
-        <p:nvSpPr>
-          <p:cNvPr id="22" name="TextBox 21"/>
-          <p:cNvSpPr txBox="1"/>
-          <p:nvPr/>
-        </p:nvSpPr>
-        <p:spPr>
-          <a:xfrm>
-            <a:off x="8119872" y="4206240"/>
-            <a:ext cx="3474720" cy="502920"/>
-          </a:xfrm>
-          <a:prstGeom prst="rect">
-            <a:avLst/>
-          </a:prstGeom>
-          <a:noFill/>
-        </p:spPr>
-        <p:txBody>
-          <a:bodyPr wrap="square">
-            <a:spAutoFit/>
-          </a:bodyPr>
-          <a:lstStyle/>
-          <a:p>
-            <a:pPr algn="l"/>
-            <a:r>
-              <a:rPr sz="1300" b="0" i="0">
-                <a:solidFill>
-                  <a:srgbClr val="B0C4DE"/>
-                </a:solidFill>
-              </a:rPr>
-              <a:t>Plugin architecture, custom skills</a:t>
-            </a:r>
-          </a:p>
-        </p:txBody>
-      </p:sp>
-      <p:sp>
-        <p:nvSpPr>
-          <p:cNvPr id="23" name="TextBox 22"/>
-          <p:cNvSpPr txBox="1"/>
-          <p:nvPr/>
-        </p:nvSpPr>
-        <p:spPr>
-          <a:xfrm>
-            <a:off x="246888" y="6263640"/>
-            <a:ext cx="11704320" cy="457200"/>
-          </a:xfrm>
-          <a:prstGeom prst="rect">
-            <a:avLst/>
-          </a:prstGeom>
-          <a:noFill/>
-        </p:spPr>
-        <p:txBody>
-          <a:bodyPr wrap="square">
-            <a:spAutoFit/>
-          </a:bodyPr>
-          <a:lstStyle/>
-          <a:p>
-            <a:pPr algn="ctr"/>
-            <a:r>
-              <a:rPr sz="1500" b="1" i="0">
-                <a:solidFill>
-                  <a:srgbClr val="F4D03F"/>
-                </a:solidFill>
-              </a:rPr>
-              <a:t>The power of OpenClaw: your AI, your rules, your infrastructure.</a:t>
-            </a:r>
           </a:p>
         </p:txBody>
       </p:sp>
@@ -6739,7 +6538,7 @@
                   <a:srgbClr val="00B4D8"/>
                 </a:solidFill>
               </a:rPr>
-              <a:t>Getting Started</a:t>
+              <a:t>OpenClaw Overview</a:t>
             </a:r>
           </a:p>
         </p:txBody>
@@ -6797,7 +6596,7 @@
         <p:spPr>
           <a:xfrm>
             <a:off x="246888" y="1463040"/>
-            <a:ext cx="5669280" cy="457200"/>
+            <a:ext cx="11704320" cy="777240"/>
           </a:xfrm>
           <a:prstGeom prst="rect">
             <a:avLst/>
@@ -6812,478 +6611,37 @@
           <a:p>
             <a:pPr algn="l"/>
             <a:r>
-              <a:rPr sz="1900" b="1" i="0">
-                <a:solidFill>
-                  <a:srgbClr val="FFFFFF"/>
-                </a:solidFill>
-              </a:rPr>
-              <a:t>OpenClaw on Docker · Azure VM</a:t>
-            </a:r>
-          </a:p>
-        </p:txBody>
-      </p:sp>
-      <p:sp>
-        <p:nvSpPr>
-          <p:cNvPr id="5" name="TextBox 4"/>
-          <p:cNvSpPr txBox="1"/>
-          <p:nvPr/>
-        </p:nvSpPr>
-        <p:spPr>
-          <a:xfrm>
-            <a:off x="246888" y="2011680"/>
-            <a:ext cx="5669280" cy="457200"/>
-          </a:xfrm>
-          <a:prstGeom prst="rect">
-            <a:avLst/>
-          </a:prstGeom>
-          <a:noFill/>
-        </p:spPr>
-        <p:txBody>
-          <a:bodyPr wrap="square">
-            <a:spAutoFit/>
-          </a:bodyPr>
-          <a:lstStyle/>
-          <a:p>
-            <a:pPr algn="l"/>
-            <a:r>
-              <a:rPr sz="1400" b="0" i="0">
+              <a:rPr sz="1600" b="0" i="1">
                 <a:solidFill>
                   <a:srgbClr val="B0C4DE"/>
                 </a:solidFill>
               </a:rPr>
-              <a:t>1.  Provision Ubuntu 22.04 VM on Azure</a:t>
-            </a:r>
-          </a:p>
-        </p:txBody>
-      </p:sp>
-      <p:sp>
-        <p:nvSpPr>
-          <p:cNvPr id="6" name="TextBox 5"/>
-          <p:cNvSpPr txBox="1"/>
-          <p:nvPr/>
-        </p:nvSpPr>
-        <p:spPr>
-          <a:xfrm>
-            <a:off x="246888" y="2414016"/>
-            <a:ext cx="5669280" cy="457200"/>
-          </a:xfrm>
-          <a:prstGeom prst="rect">
-            <a:avLst/>
-          </a:prstGeom>
-          <a:noFill/>
-        </p:spPr>
-        <p:txBody>
-          <a:bodyPr wrap="square">
-            <a:spAutoFit/>
-          </a:bodyPr>
-          <a:lstStyle/>
-          <a:p>
-            <a:pPr algn="l"/>
-            <a:r>
-              <a:rPr sz="1400" b="0" i="0">
-                <a:solidFill>
-                  <a:srgbClr val="B0C4DE"/>
-                </a:solidFill>
-              </a:rPr>
-              <a:t>2.  Install Docker + Docker Compose</a:t>
-            </a:r>
-          </a:p>
-        </p:txBody>
-      </p:sp>
-      <p:sp>
-        <p:nvSpPr>
-          <p:cNvPr id="7" name="TextBox 6"/>
-          <p:cNvSpPr txBox="1"/>
-          <p:nvPr/>
-        </p:nvSpPr>
-        <p:spPr>
-          <a:xfrm>
-            <a:off x="246888" y="2816352"/>
-            <a:ext cx="5669280" cy="457200"/>
-          </a:xfrm>
-          <a:prstGeom prst="rect">
-            <a:avLst/>
-          </a:prstGeom>
-          <a:noFill/>
-        </p:spPr>
-        <p:txBody>
-          <a:bodyPr wrap="square">
-            <a:spAutoFit/>
-          </a:bodyPr>
-          <a:lstStyle/>
-          <a:p>
-            <a:pPr algn="l"/>
-            <a:r>
-              <a:rPr sz="1400" b="0" i="0">
-                <a:solidFill>
-                  <a:srgbClr val="B0C4DE"/>
-                </a:solidFill>
-              </a:rPr>
-              <a:t>3.  Pull the OpenClaw Docker image</a:t>
-            </a:r>
-          </a:p>
-        </p:txBody>
-      </p:sp>
-      <p:sp>
-        <p:nvSpPr>
-          <p:cNvPr id="8" name="TextBox 7"/>
-          <p:cNvSpPr txBox="1"/>
-          <p:nvPr/>
-        </p:nvSpPr>
-        <p:spPr>
-          <a:xfrm>
-            <a:off x="246888" y="3218688"/>
-            <a:ext cx="5669280" cy="457200"/>
-          </a:xfrm>
-          <a:prstGeom prst="rect">
-            <a:avLst/>
-          </a:prstGeom>
-          <a:noFill/>
-        </p:spPr>
-        <p:txBody>
-          <a:bodyPr wrap="square">
-            <a:spAutoFit/>
-          </a:bodyPr>
-          <a:lstStyle/>
-          <a:p>
-            <a:pPr algn="l"/>
-            <a:r>
-              <a:rPr sz="1400" b="0" i="0">
-                <a:solidFill>
-                  <a:srgbClr val="B0C4DE"/>
-                </a:solidFill>
-              </a:rPr>
-              <a:t>4.  Configure openclaw.json
-     (model keys, channels, workspace)</a:t>
-            </a:r>
-          </a:p>
-        </p:txBody>
-      </p:sp>
-      <p:sp>
-        <p:nvSpPr>
-          <p:cNvPr id="9" name="TextBox 8"/>
-          <p:cNvSpPr txBox="1"/>
-          <p:nvPr/>
-        </p:nvSpPr>
-        <p:spPr>
-          <a:xfrm>
-            <a:off x="246888" y="3621024"/>
-            <a:ext cx="5669280" cy="457200"/>
-          </a:xfrm>
-          <a:prstGeom prst="rect">
-            <a:avLst/>
-          </a:prstGeom>
-          <a:noFill/>
-        </p:spPr>
-        <p:txBody>
-          <a:bodyPr wrap="square">
-            <a:spAutoFit/>
-          </a:bodyPr>
-          <a:lstStyle/>
-          <a:p>
-            <a:pPr algn="l"/>
-            <a:r>
-              <a:rPr sz="1400" b="0" i="0">
-                <a:solidFill>
-                  <a:srgbClr val="B0C4DE"/>
-                </a:solidFill>
-              </a:rPr>
-              <a:t>5.  docker compose up -d</a:t>
-            </a:r>
-          </a:p>
-        </p:txBody>
-      </p:sp>
-      <p:sp>
-        <p:nvSpPr>
-          <p:cNvPr id="10" name="TextBox 9"/>
-          <p:cNvSpPr txBox="1"/>
-          <p:nvPr/>
-        </p:nvSpPr>
-        <p:spPr>
-          <a:xfrm>
-            <a:off x="246888" y="4023360"/>
-            <a:ext cx="5669280" cy="457200"/>
-          </a:xfrm>
-          <a:prstGeom prst="rect">
-            <a:avLst/>
-          </a:prstGeom>
-          <a:noFill/>
-        </p:spPr>
-        <p:txBody>
-          <a:bodyPr wrap="square">
-            <a:spAutoFit/>
-          </a:bodyPr>
-          <a:lstStyle/>
-          <a:p>
-            <a:pPr algn="l"/>
-            <a:r>
-              <a:rPr sz="1400" b="0" i="0">
-                <a:solidFill>
-                  <a:srgbClr val="B0C4DE"/>
-                </a:solidFill>
-              </a:rPr>
-              <a:t>6.  Connect WhatsApp / Telegram channel</a:t>
-            </a:r>
-          </a:p>
-        </p:txBody>
-      </p:sp>
-      <p:sp>
-        <p:nvSpPr>
-          <p:cNvPr id="11" name="TextBox 10"/>
-          <p:cNvSpPr txBox="1"/>
-          <p:nvPr/>
-        </p:nvSpPr>
-        <p:spPr>
-          <a:xfrm>
-            <a:off x="6217920" y="1463040"/>
-            <a:ext cx="5669280" cy="457200"/>
-          </a:xfrm>
-          <a:prstGeom prst="rect">
-            <a:avLst/>
-          </a:prstGeom>
-          <a:noFill/>
-        </p:spPr>
-        <p:txBody>
-          <a:bodyPr wrap="square">
-            <a:spAutoFit/>
-          </a:bodyPr>
-          <a:lstStyle/>
-          <a:p>
-            <a:pPr algn="l"/>
-            <a:r>
-              <a:rPr sz="1900" b="1" i="0">
-                <a:solidFill>
-                  <a:srgbClr val="FFFFFF"/>
-                </a:solidFill>
-              </a:rPr>
-              <a:t>Hermes — Self-Healing Upgrades</a:t>
-            </a:r>
-          </a:p>
-        </p:txBody>
-      </p:sp>
-      <p:sp>
-        <p:nvSpPr>
-          <p:cNvPr id="12" name="TextBox 11"/>
-          <p:cNvSpPr txBox="1"/>
-          <p:nvPr/>
-        </p:nvSpPr>
-        <p:spPr>
-          <a:xfrm>
-            <a:off x="6217920" y="2011680"/>
-            <a:ext cx="5669280" cy="457200"/>
-          </a:xfrm>
-          <a:prstGeom prst="rect">
-            <a:avLst/>
-          </a:prstGeom>
-          <a:noFill/>
-        </p:spPr>
-        <p:txBody>
-          <a:bodyPr wrap="square">
-            <a:spAutoFit/>
-          </a:bodyPr>
-          <a:lstStyle/>
-          <a:p>
-            <a:pPr algn="l"/>
-            <a:r>
-              <a:rPr sz="1400" b="0" i="0">
-                <a:solidFill>
-                  <a:srgbClr val="B0C4DE"/>
-                </a:solidFill>
-              </a:rPr>
-              <a:t>1.  Install Hermes via OpenClaw plugin</a:t>
-            </a:r>
-          </a:p>
-        </p:txBody>
-      </p:sp>
-      <p:sp>
-        <p:nvSpPr>
-          <p:cNvPr id="13" name="TextBox 12"/>
-          <p:cNvSpPr txBox="1"/>
-          <p:nvPr/>
-        </p:nvSpPr>
-        <p:spPr>
-          <a:xfrm>
-            <a:off x="6217920" y="2414016"/>
-            <a:ext cx="5669280" cy="457200"/>
-          </a:xfrm>
-          <a:prstGeom prst="rect">
-            <a:avLst/>
-          </a:prstGeom>
-          <a:noFill/>
-        </p:spPr>
-        <p:txBody>
-          <a:bodyPr wrap="square">
-            <a:spAutoFit/>
-          </a:bodyPr>
-          <a:lstStyle/>
-          <a:p>
-            <a:pPr algn="l"/>
-            <a:r>
-              <a:rPr sz="1400" b="0" i="0">
-                <a:solidFill>
-                  <a:srgbClr val="B0C4DE"/>
-                </a:solidFill>
-              </a:rPr>
-              <a:t>2.  Configure as an advisor/orchestrator agent</a:t>
-            </a:r>
-          </a:p>
-        </p:txBody>
-      </p:sp>
-      <p:sp>
-        <p:nvSpPr>
-          <p:cNvPr id="14" name="TextBox 13"/>
-          <p:cNvSpPr txBox="1"/>
-          <p:nvPr/>
-        </p:nvSpPr>
-        <p:spPr>
-          <a:xfrm>
-            <a:off x="6217920" y="2816352"/>
-            <a:ext cx="5669280" cy="457200"/>
-          </a:xfrm>
-          <a:prstGeom prst="rect">
-            <a:avLst/>
-          </a:prstGeom>
-          <a:noFill/>
-        </p:spPr>
-        <p:txBody>
-          <a:bodyPr wrap="square">
-            <a:spAutoFit/>
-          </a:bodyPr>
-          <a:lstStyle/>
-          <a:p>
-            <a:pPr algn="l"/>
-            <a:r>
-              <a:rPr sz="1400" b="0" i="0">
-                <a:solidFill>
-                  <a:srgbClr val="B0C4DE"/>
-                </a:solidFill>
-              </a:rPr>
-              <a:t>3.  Set upgrade watch on OpenClaw service</a:t>
-            </a:r>
-          </a:p>
-        </p:txBody>
-      </p:sp>
-      <p:sp>
-        <p:nvSpPr>
-          <p:cNvPr id="15" name="TextBox 14"/>
-          <p:cNvSpPr txBox="1"/>
-          <p:nvPr/>
-        </p:nvSpPr>
-        <p:spPr>
-          <a:xfrm>
-            <a:off x="6217920" y="3218688"/>
-            <a:ext cx="5669280" cy="457200"/>
-          </a:xfrm>
-          <a:prstGeom prst="rect">
-            <a:avLst/>
-          </a:prstGeom>
-          <a:noFill/>
-        </p:spPr>
-        <p:txBody>
-          <a:bodyPr wrap="square">
-            <a:spAutoFit/>
-          </a:bodyPr>
-          <a:lstStyle/>
-          <a:p>
-            <a:pPr algn="l"/>
-            <a:r>
-              <a:rPr sz="1400" b="0" i="0">
-                <a:solidFill>
-                  <a:srgbClr val="B0C4DE"/>
-                </a:solidFill>
-              </a:rPr>
-              <a:t>4.  Hermes detects breaking changes post-upgrade</a:t>
-            </a:r>
-          </a:p>
-        </p:txBody>
-      </p:sp>
-      <p:sp>
-        <p:nvSpPr>
-          <p:cNvPr id="16" name="TextBox 15"/>
-          <p:cNvSpPr txBox="1"/>
-          <p:nvPr/>
-        </p:nvSpPr>
-        <p:spPr>
-          <a:xfrm>
-            <a:off x="6217920" y="3621024"/>
-            <a:ext cx="5669280" cy="457200"/>
-          </a:xfrm>
-          <a:prstGeom prst="rect">
-            <a:avLst/>
-          </a:prstGeom>
-          <a:noFill/>
-        </p:spPr>
-        <p:txBody>
-          <a:bodyPr wrap="square">
-            <a:spAutoFit/>
-          </a:bodyPr>
-          <a:lstStyle/>
-          <a:p>
-            <a:pPr algn="l"/>
-            <a:r>
-              <a:rPr sz="1400" b="0" i="0">
-                <a:solidFill>
-                  <a:srgbClr val="B0C4DE"/>
-                </a:solidFill>
-              </a:rPr>
-              <a:t>5.  Auto-generates and applies fixes</a:t>
-            </a:r>
-          </a:p>
-        </p:txBody>
-      </p:sp>
-      <p:sp>
-        <p:nvSpPr>
-          <p:cNvPr id="17" name="TextBox 16"/>
-          <p:cNvSpPr txBox="1"/>
-          <p:nvPr/>
-        </p:nvSpPr>
-        <p:spPr>
-          <a:xfrm>
-            <a:off x="6217920" y="4023360"/>
-            <a:ext cx="5669280" cy="457200"/>
-          </a:xfrm>
-          <a:prstGeom prst="rect">
-            <a:avLst/>
-          </a:prstGeom>
-          <a:noFill/>
-        </p:spPr>
-        <p:txBody>
-          <a:bodyPr wrap="square">
-            <a:spAutoFit/>
-          </a:bodyPr>
-          <a:lstStyle/>
-          <a:p>
-            <a:pPr algn="l"/>
-            <a:r>
-              <a:rPr sz="1400" b="0" i="0">
-                <a:solidFill>
-                  <a:srgbClr val="B0C4DE"/>
-                </a:solidFill>
-              </a:rPr>
-              <a:t>6.  Reports back with change summary</a:t>
-            </a:r>
-          </a:p>
-        </p:txBody>
-      </p:sp>
-      <p:sp>
-        <p:nvSpPr>
-          <p:cNvPr id="18" name="Rectangle 17"/>
+              <a:t>OpenClaw is a self-hosted AI gateway and agent platform — connecting LLMs to your life, your tools, and your data without sending everything to the cloud.</a:t>
+            </a:r>
+          </a:p>
+        </p:txBody>
+      </p:sp>
+      <p:sp>
+        <p:nvSpPr>
+          <p:cNvPr id="5" name="Rectangle 4"/>
           <p:cNvSpPr/>
           <p:nvPr/>
         </p:nvSpPr>
         <p:spPr>
           <a:xfrm>
-            <a:off x="6035040" y="1417320"/>
-            <a:ext cx="27432" cy="4754880"/>
+            <a:off x="246888" y="2423160"/>
+            <a:ext cx="3657600" cy="1097280"/>
           </a:xfrm>
           <a:prstGeom prst="rect">
             <a:avLst/>
           </a:prstGeom>
           <a:solidFill>
-            <a:srgbClr val="00B4D8"/>
+            <a:srgbClr val="060F1A"/>
           </a:solidFill>
           <a:ln>
-            <a:noFill/>
+            <a:solidFill>
+              <a:srgbClr val="00B4D8"/>
+            </a:solidFill>
           </a:ln>
         </p:spPr>
         <p:style>
@@ -7306,6 +6664,678 @@
           <a:p>
             <a:pPr algn="ctr"/>
             <a:endParaRPr/>
+          </a:p>
+        </p:txBody>
+      </p:sp>
+      <p:sp>
+        <p:nvSpPr>
+          <p:cNvPr id="6" name="TextBox 5"/>
+          <p:cNvSpPr txBox="1"/>
+          <p:nvPr/>
+        </p:nvSpPr>
+        <p:spPr>
+          <a:xfrm>
+            <a:off x="320040" y="2468879"/>
+            <a:ext cx="3474720" cy="365760"/>
+          </a:xfrm>
+          <a:prstGeom prst="rect">
+            <a:avLst/>
+          </a:prstGeom>
+          <a:noFill/>
+        </p:spPr>
+        <p:txBody>
+          <a:bodyPr wrap="square">
+            <a:spAutoFit/>
+          </a:bodyPr>
+          <a:lstStyle/>
+          <a:p>
+            <a:pPr algn="l"/>
+            <a:r>
+              <a:rPr sz="1500" b="1" i="0">
+                <a:solidFill>
+                  <a:srgbClr val="00B4D8"/>
+                </a:solidFill>
+              </a:rPr>
+              <a:t>🔌  Multi-provider</a:t>
+            </a:r>
+          </a:p>
+        </p:txBody>
+      </p:sp>
+      <p:sp>
+        <p:nvSpPr>
+          <p:cNvPr id="7" name="TextBox 6"/>
+          <p:cNvSpPr txBox="1"/>
+          <p:nvPr/>
+        </p:nvSpPr>
+        <p:spPr>
+          <a:xfrm>
+            <a:off x="320040" y="2880360"/>
+            <a:ext cx="3474720" cy="502920"/>
+          </a:xfrm>
+          <a:prstGeom prst="rect">
+            <a:avLst/>
+          </a:prstGeom>
+          <a:noFill/>
+        </p:spPr>
+        <p:txBody>
+          <a:bodyPr wrap="square">
+            <a:spAutoFit/>
+          </a:bodyPr>
+          <a:lstStyle/>
+          <a:p>
+            <a:pPr algn="l"/>
+            <a:r>
+              <a:rPr sz="1300" b="0" i="0">
+                <a:solidFill>
+                  <a:srgbClr val="B0C4DE"/>
+                </a:solidFill>
+              </a:rPr>
+              <a:t>Anthropic, OpenAI, Google, xAI, Mistral…</a:t>
+            </a:r>
+          </a:p>
+        </p:txBody>
+      </p:sp>
+      <p:sp>
+        <p:nvSpPr>
+          <p:cNvPr id="8" name="Rectangle 7"/>
+          <p:cNvSpPr/>
+          <p:nvPr/>
+        </p:nvSpPr>
+        <p:spPr>
+          <a:xfrm>
+            <a:off x="4160520" y="2423160"/>
+            <a:ext cx="3657600" cy="1097280"/>
+          </a:xfrm>
+          <a:prstGeom prst="rect">
+            <a:avLst/>
+          </a:prstGeom>
+          <a:solidFill>
+            <a:srgbClr val="060F1A"/>
+          </a:solidFill>
+          <a:ln>
+            <a:solidFill>
+              <a:srgbClr val="00B4D8"/>
+            </a:solidFill>
+          </a:ln>
+        </p:spPr>
+        <p:style>
+          <a:lnRef idx="1">
+            <a:schemeClr val="accent1"/>
+          </a:lnRef>
+          <a:fillRef idx="3">
+            <a:schemeClr val="accent1"/>
+          </a:fillRef>
+          <a:effectRef idx="2">
+            <a:schemeClr val="accent1"/>
+          </a:effectRef>
+          <a:fontRef idx="minor">
+            <a:schemeClr val="lt1"/>
+          </a:fontRef>
+        </p:style>
+        <p:txBody>
+          <a:bodyPr rtlCol="0" anchor="ctr"/>
+          <a:lstStyle/>
+          <a:p>
+            <a:pPr algn="ctr"/>
+            <a:endParaRPr/>
+          </a:p>
+        </p:txBody>
+      </p:sp>
+      <p:sp>
+        <p:nvSpPr>
+          <p:cNvPr id="9" name="TextBox 8"/>
+          <p:cNvSpPr txBox="1"/>
+          <p:nvPr/>
+        </p:nvSpPr>
+        <p:spPr>
+          <a:xfrm>
+            <a:off x="4233672" y="2468879"/>
+            <a:ext cx="3474720" cy="365760"/>
+          </a:xfrm>
+          <a:prstGeom prst="rect">
+            <a:avLst/>
+          </a:prstGeom>
+          <a:noFill/>
+        </p:spPr>
+        <p:txBody>
+          <a:bodyPr wrap="square">
+            <a:spAutoFit/>
+          </a:bodyPr>
+          <a:lstStyle/>
+          <a:p>
+            <a:pPr algn="l"/>
+            <a:r>
+              <a:rPr sz="1500" b="1" i="0">
+                <a:solidFill>
+                  <a:srgbClr val="00B4D8"/>
+                </a:solidFill>
+              </a:rPr>
+              <a:t>🧠  Long-term memory</a:t>
+            </a:r>
+          </a:p>
+        </p:txBody>
+      </p:sp>
+      <p:sp>
+        <p:nvSpPr>
+          <p:cNvPr id="10" name="TextBox 9"/>
+          <p:cNvSpPr txBox="1"/>
+          <p:nvPr/>
+        </p:nvSpPr>
+        <p:spPr>
+          <a:xfrm>
+            <a:off x="4233672" y="2880360"/>
+            <a:ext cx="3474720" cy="502920"/>
+          </a:xfrm>
+          <a:prstGeom prst="rect">
+            <a:avLst/>
+          </a:prstGeom>
+          <a:noFill/>
+        </p:spPr>
+        <p:txBody>
+          <a:bodyPr wrap="square">
+            <a:spAutoFit/>
+          </a:bodyPr>
+          <a:lstStyle/>
+          <a:p>
+            <a:pPr algn="l"/>
+            <a:r>
+              <a:rPr sz="1300" b="0" i="0">
+                <a:solidFill>
+                  <a:srgbClr val="B0C4DE"/>
+                </a:solidFill>
+              </a:rPr>
+              <a:t>Semantic search across sessions + Obsidian vault</a:t>
+            </a:r>
+          </a:p>
+        </p:txBody>
+      </p:sp>
+      <p:sp>
+        <p:nvSpPr>
+          <p:cNvPr id="11" name="Rectangle 10"/>
+          <p:cNvSpPr/>
+          <p:nvPr/>
+        </p:nvSpPr>
+        <p:spPr>
+          <a:xfrm>
+            <a:off x="8046720" y="2423160"/>
+            <a:ext cx="3657600" cy="1097280"/>
+          </a:xfrm>
+          <a:prstGeom prst="rect">
+            <a:avLst/>
+          </a:prstGeom>
+          <a:solidFill>
+            <a:srgbClr val="060F1A"/>
+          </a:solidFill>
+          <a:ln>
+            <a:solidFill>
+              <a:srgbClr val="00B4D8"/>
+            </a:solidFill>
+          </a:ln>
+        </p:spPr>
+        <p:style>
+          <a:lnRef idx="1">
+            <a:schemeClr val="accent1"/>
+          </a:lnRef>
+          <a:fillRef idx="3">
+            <a:schemeClr val="accent1"/>
+          </a:fillRef>
+          <a:effectRef idx="2">
+            <a:schemeClr val="accent1"/>
+          </a:effectRef>
+          <a:fontRef idx="minor">
+            <a:schemeClr val="lt1"/>
+          </a:fontRef>
+        </p:style>
+        <p:txBody>
+          <a:bodyPr rtlCol="0" anchor="ctr"/>
+          <a:lstStyle/>
+          <a:p>
+            <a:pPr algn="ctr"/>
+            <a:endParaRPr/>
+          </a:p>
+        </p:txBody>
+      </p:sp>
+      <p:sp>
+        <p:nvSpPr>
+          <p:cNvPr id="12" name="TextBox 11"/>
+          <p:cNvSpPr txBox="1"/>
+          <p:nvPr/>
+        </p:nvSpPr>
+        <p:spPr>
+          <a:xfrm>
+            <a:off x="8119872" y="2468879"/>
+            <a:ext cx="3474720" cy="365760"/>
+          </a:xfrm>
+          <a:prstGeom prst="rect">
+            <a:avLst/>
+          </a:prstGeom>
+          <a:noFill/>
+        </p:spPr>
+        <p:txBody>
+          <a:bodyPr wrap="square">
+            <a:spAutoFit/>
+          </a:bodyPr>
+          <a:lstStyle/>
+          <a:p>
+            <a:pPr algn="l"/>
+            <a:r>
+              <a:rPr sz="1500" b="1" i="0">
+                <a:solidFill>
+                  <a:srgbClr val="00B4D8"/>
+                </a:solidFill>
+              </a:rPr>
+              <a:t>📱  Any channel</a:t>
+            </a:r>
+          </a:p>
+        </p:txBody>
+      </p:sp>
+      <p:sp>
+        <p:nvSpPr>
+          <p:cNvPr id="13" name="TextBox 12"/>
+          <p:cNvSpPr txBox="1"/>
+          <p:nvPr/>
+        </p:nvSpPr>
+        <p:spPr>
+          <a:xfrm>
+            <a:off x="8119872" y="2880360"/>
+            <a:ext cx="3474720" cy="502920"/>
+          </a:xfrm>
+          <a:prstGeom prst="rect">
+            <a:avLst/>
+          </a:prstGeom>
+          <a:noFill/>
+        </p:spPr>
+        <p:txBody>
+          <a:bodyPr wrap="square">
+            <a:spAutoFit/>
+          </a:bodyPr>
+          <a:lstStyle/>
+          <a:p>
+            <a:pPr algn="l"/>
+            <a:r>
+              <a:rPr sz="1300" b="0" i="0">
+                <a:solidFill>
+                  <a:srgbClr val="B0C4DE"/>
+                </a:solidFill>
+              </a:rPr>
+              <a:t>WhatsApp, Telegram, Discord, Signal…</a:t>
+            </a:r>
+          </a:p>
+        </p:txBody>
+      </p:sp>
+      <p:sp>
+        <p:nvSpPr>
+          <p:cNvPr id="14" name="Rectangle 13"/>
+          <p:cNvSpPr/>
+          <p:nvPr/>
+        </p:nvSpPr>
+        <p:spPr>
+          <a:xfrm>
+            <a:off x="246888" y="3749039"/>
+            <a:ext cx="3657600" cy="1097280"/>
+          </a:xfrm>
+          <a:prstGeom prst="rect">
+            <a:avLst/>
+          </a:prstGeom>
+          <a:solidFill>
+            <a:srgbClr val="060F1A"/>
+          </a:solidFill>
+          <a:ln>
+            <a:solidFill>
+              <a:srgbClr val="00B4D8"/>
+            </a:solidFill>
+          </a:ln>
+        </p:spPr>
+        <p:style>
+          <a:lnRef idx="1">
+            <a:schemeClr val="accent1"/>
+          </a:lnRef>
+          <a:fillRef idx="3">
+            <a:schemeClr val="accent1"/>
+          </a:fillRef>
+          <a:effectRef idx="2">
+            <a:schemeClr val="accent1"/>
+          </a:effectRef>
+          <a:fontRef idx="minor">
+            <a:schemeClr val="lt1"/>
+          </a:fontRef>
+        </p:style>
+        <p:txBody>
+          <a:bodyPr rtlCol="0" anchor="ctr"/>
+          <a:lstStyle/>
+          <a:p>
+            <a:pPr algn="ctr"/>
+            <a:endParaRPr/>
+          </a:p>
+        </p:txBody>
+      </p:sp>
+      <p:sp>
+        <p:nvSpPr>
+          <p:cNvPr id="15" name="TextBox 14"/>
+          <p:cNvSpPr txBox="1"/>
+          <p:nvPr/>
+        </p:nvSpPr>
+        <p:spPr>
+          <a:xfrm>
+            <a:off x="320040" y="3794759"/>
+            <a:ext cx="3474720" cy="365760"/>
+          </a:xfrm>
+          <a:prstGeom prst="rect">
+            <a:avLst/>
+          </a:prstGeom>
+          <a:noFill/>
+        </p:spPr>
+        <p:txBody>
+          <a:bodyPr wrap="square">
+            <a:spAutoFit/>
+          </a:bodyPr>
+          <a:lstStyle/>
+          <a:p>
+            <a:pPr algn="l"/>
+            <a:r>
+              <a:rPr sz="1500" b="1" i="0">
+                <a:solidFill>
+                  <a:srgbClr val="00B4D8"/>
+                </a:solidFill>
+              </a:rPr>
+              <a:t>🤖  Agentic skills</a:t>
+            </a:r>
+          </a:p>
+        </p:txBody>
+      </p:sp>
+      <p:sp>
+        <p:nvSpPr>
+          <p:cNvPr id="16" name="TextBox 15"/>
+          <p:cNvSpPr txBox="1"/>
+          <p:nvPr/>
+        </p:nvSpPr>
+        <p:spPr>
+          <a:xfrm>
+            <a:off x="320040" y="4206240"/>
+            <a:ext cx="3474720" cy="502920"/>
+          </a:xfrm>
+          <a:prstGeom prst="rect">
+            <a:avLst/>
+          </a:prstGeom>
+          <a:noFill/>
+        </p:spPr>
+        <p:txBody>
+          <a:bodyPr wrap="square">
+            <a:spAutoFit/>
+          </a:bodyPr>
+          <a:lstStyle/>
+          <a:p>
+            <a:pPr algn="l"/>
+            <a:r>
+              <a:rPr sz="1300" b="0" i="0">
+                <a:solidFill>
+                  <a:srgbClr val="B0C4DE"/>
+                </a:solidFill>
+              </a:rPr>
+              <a:t>Scheduled tasks, tools, sub-agents</a:t>
+            </a:r>
+          </a:p>
+        </p:txBody>
+      </p:sp>
+      <p:sp>
+        <p:nvSpPr>
+          <p:cNvPr id="17" name="Rectangle 16"/>
+          <p:cNvSpPr/>
+          <p:nvPr/>
+        </p:nvSpPr>
+        <p:spPr>
+          <a:xfrm>
+            <a:off x="4160520" y="3749039"/>
+            <a:ext cx="3657600" cy="1097280"/>
+          </a:xfrm>
+          <a:prstGeom prst="rect">
+            <a:avLst/>
+          </a:prstGeom>
+          <a:solidFill>
+            <a:srgbClr val="060F1A"/>
+          </a:solidFill>
+          <a:ln>
+            <a:solidFill>
+              <a:srgbClr val="00B4D8"/>
+            </a:solidFill>
+          </a:ln>
+        </p:spPr>
+        <p:style>
+          <a:lnRef idx="1">
+            <a:schemeClr val="accent1"/>
+          </a:lnRef>
+          <a:fillRef idx="3">
+            <a:schemeClr val="accent1"/>
+          </a:fillRef>
+          <a:effectRef idx="2">
+            <a:schemeClr val="accent1"/>
+          </a:effectRef>
+          <a:fontRef idx="minor">
+            <a:schemeClr val="lt1"/>
+          </a:fontRef>
+        </p:style>
+        <p:txBody>
+          <a:bodyPr rtlCol="0" anchor="ctr"/>
+          <a:lstStyle/>
+          <a:p>
+            <a:pPr algn="ctr"/>
+            <a:endParaRPr/>
+          </a:p>
+        </p:txBody>
+      </p:sp>
+      <p:sp>
+        <p:nvSpPr>
+          <p:cNvPr id="18" name="TextBox 17"/>
+          <p:cNvSpPr txBox="1"/>
+          <p:nvPr/>
+        </p:nvSpPr>
+        <p:spPr>
+          <a:xfrm>
+            <a:off x="4233672" y="3794759"/>
+            <a:ext cx="3474720" cy="365760"/>
+          </a:xfrm>
+          <a:prstGeom prst="rect">
+            <a:avLst/>
+          </a:prstGeom>
+          <a:noFill/>
+        </p:spPr>
+        <p:txBody>
+          <a:bodyPr wrap="square">
+            <a:spAutoFit/>
+          </a:bodyPr>
+          <a:lstStyle/>
+          <a:p>
+            <a:pPr algn="l"/>
+            <a:r>
+              <a:rPr sz="1500" b="1" i="0">
+                <a:solidFill>
+                  <a:srgbClr val="00B4D8"/>
+                </a:solidFill>
+              </a:rPr>
+              <a:t>🔒  Self-hosted</a:t>
+            </a:r>
+          </a:p>
+        </p:txBody>
+      </p:sp>
+      <p:sp>
+        <p:nvSpPr>
+          <p:cNvPr id="19" name="TextBox 18"/>
+          <p:cNvSpPr txBox="1"/>
+          <p:nvPr/>
+        </p:nvSpPr>
+        <p:spPr>
+          <a:xfrm>
+            <a:off x="4233672" y="4206240"/>
+            <a:ext cx="3474720" cy="502920"/>
+          </a:xfrm>
+          <a:prstGeom prst="rect">
+            <a:avLst/>
+          </a:prstGeom>
+          <a:noFill/>
+        </p:spPr>
+        <p:txBody>
+          <a:bodyPr wrap="square">
+            <a:spAutoFit/>
+          </a:bodyPr>
+          <a:lstStyle/>
+          <a:p>
+            <a:pPr algn="l"/>
+            <a:r>
+              <a:rPr sz="1300" b="0" i="0">
+                <a:solidFill>
+                  <a:srgbClr val="B0C4DE"/>
+                </a:solidFill>
+              </a:rPr>
+              <a:t>Your data stays on your infrastructure</a:t>
+            </a:r>
+          </a:p>
+        </p:txBody>
+      </p:sp>
+      <p:sp>
+        <p:nvSpPr>
+          <p:cNvPr id="20" name="Rectangle 19"/>
+          <p:cNvSpPr/>
+          <p:nvPr/>
+        </p:nvSpPr>
+        <p:spPr>
+          <a:xfrm>
+            <a:off x="8046720" y="3749039"/>
+            <a:ext cx="3657600" cy="1097280"/>
+          </a:xfrm>
+          <a:prstGeom prst="rect">
+            <a:avLst/>
+          </a:prstGeom>
+          <a:solidFill>
+            <a:srgbClr val="060F1A"/>
+          </a:solidFill>
+          <a:ln>
+            <a:solidFill>
+              <a:srgbClr val="00B4D8"/>
+            </a:solidFill>
+          </a:ln>
+        </p:spPr>
+        <p:style>
+          <a:lnRef idx="1">
+            <a:schemeClr val="accent1"/>
+          </a:lnRef>
+          <a:fillRef idx="3">
+            <a:schemeClr val="accent1"/>
+          </a:fillRef>
+          <a:effectRef idx="2">
+            <a:schemeClr val="accent1"/>
+          </a:effectRef>
+          <a:fontRef idx="minor">
+            <a:schemeClr val="lt1"/>
+          </a:fontRef>
+        </p:style>
+        <p:txBody>
+          <a:bodyPr rtlCol="0" anchor="ctr"/>
+          <a:lstStyle/>
+          <a:p>
+            <a:pPr algn="ctr"/>
+            <a:endParaRPr/>
+          </a:p>
+        </p:txBody>
+      </p:sp>
+      <p:sp>
+        <p:nvSpPr>
+          <p:cNvPr id="21" name="TextBox 20"/>
+          <p:cNvSpPr txBox="1"/>
+          <p:nvPr/>
+        </p:nvSpPr>
+        <p:spPr>
+          <a:xfrm>
+            <a:off x="8119872" y="3794759"/>
+            <a:ext cx="3474720" cy="365760"/>
+          </a:xfrm>
+          <a:prstGeom prst="rect">
+            <a:avLst/>
+          </a:prstGeom>
+          <a:noFill/>
+        </p:spPr>
+        <p:txBody>
+          <a:bodyPr wrap="square">
+            <a:spAutoFit/>
+          </a:bodyPr>
+          <a:lstStyle/>
+          <a:p>
+            <a:pPr algn="l"/>
+            <a:r>
+              <a:rPr sz="1500" b="1" i="0">
+                <a:solidFill>
+                  <a:srgbClr val="00B4D8"/>
+                </a:solidFill>
+              </a:rPr>
+              <a:t>🛠  Extensible</a:t>
+            </a:r>
+          </a:p>
+        </p:txBody>
+      </p:sp>
+      <p:sp>
+        <p:nvSpPr>
+          <p:cNvPr id="22" name="TextBox 21"/>
+          <p:cNvSpPr txBox="1"/>
+          <p:nvPr/>
+        </p:nvSpPr>
+        <p:spPr>
+          <a:xfrm>
+            <a:off x="8119872" y="4206240"/>
+            <a:ext cx="3474720" cy="502920"/>
+          </a:xfrm>
+          <a:prstGeom prst="rect">
+            <a:avLst/>
+          </a:prstGeom>
+          <a:noFill/>
+        </p:spPr>
+        <p:txBody>
+          <a:bodyPr wrap="square">
+            <a:spAutoFit/>
+          </a:bodyPr>
+          <a:lstStyle/>
+          <a:p>
+            <a:pPr algn="l"/>
+            <a:r>
+              <a:rPr sz="1300" b="0" i="0">
+                <a:solidFill>
+                  <a:srgbClr val="B0C4DE"/>
+                </a:solidFill>
+              </a:rPr>
+              <a:t>Plugin architecture, custom skills</a:t>
+            </a:r>
+          </a:p>
+        </p:txBody>
+      </p:sp>
+      <p:sp>
+        <p:nvSpPr>
+          <p:cNvPr id="23" name="TextBox 22"/>
+          <p:cNvSpPr txBox="1"/>
+          <p:nvPr/>
+        </p:nvSpPr>
+        <p:spPr>
+          <a:xfrm>
+            <a:off x="246888" y="6263640"/>
+            <a:ext cx="11704320" cy="457200"/>
+          </a:xfrm>
+          <a:prstGeom prst="rect">
+            <a:avLst/>
+          </a:prstGeom>
+          <a:noFill/>
+        </p:spPr>
+        <p:txBody>
+          <a:bodyPr wrap="square">
+            <a:spAutoFit/>
+          </a:bodyPr>
+          <a:lstStyle/>
+          <a:p>
+            <a:pPr algn="ctr"/>
+            <a:r>
+              <a:rPr sz="1500" b="1" i="0">
+                <a:solidFill>
+                  <a:srgbClr val="F4D03F"/>
+                </a:solidFill>
+              </a:rPr>
+              <a:t>The power of OpenClaw: your AI, your rules, your infrastructure.</a:t>
+            </a:r>
           </a:p>
         </p:txBody>
       </p:sp>

--- a/thought_bottleneck.pptx
+++ b/thought_bottleneck.pptx
@@ -5102,6 +5102,36 @@
           </a:p>
         </p:txBody>
       </p:sp>
+      <p:pic>
+        <p:nvPicPr>
+          <p:cNvPr id="8" name="Picture 7">
+            <a:extLst>
+              <a:ext uri="{FF2B5EF4-FFF2-40B4-BE49-F238E27FC236}">
+                <a16:creationId xmlns:a16="http://schemas.microsoft.com/office/drawing/2014/main" id="{EE576EF9-D737-CB2F-57FE-604B09B9C786}"/>
+              </a:ext>
+            </a:extLst>
+          </p:cNvPr>
+          <p:cNvPicPr>
+            <a:picLocks noChangeAspect="1"/>
+          </p:cNvPicPr>
+          <p:nvPr/>
+        </p:nvPicPr>
+        <p:blipFill>
+          <a:blip r:embed="rId2"/>
+          <a:stretch>
+            <a:fillRect/>
+          </a:stretch>
+        </p:blipFill>
+        <p:spPr>
+          <a:xfrm>
+            <a:off x="5864769" y="2267712"/>
+            <a:ext cx="5819183" cy="2883351"/>
+          </a:xfrm>
+          <a:prstGeom prst="rect">
+            <a:avLst/>
+          </a:prstGeom>
+        </p:spPr>
+      </p:pic>
     </p:spTree>
   </p:cSld>
   <p:clrMapOvr>
